--- a/tests/report_generator/integration/references/reference_portfolio-baseline-report.pptx
+++ b/tests/report_generator/integration/references/reference_portfolio-baseline-report.pptx
@@ -3206,7 +3206,7 @@
                 <c:formatCode>General</c:formatCode>
                 <c:ptCount val="4"/>
                 <c:pt idx="0">
-                  <c:v>79</c:v>
+                  <c:v>85</c:v>
                 </c:pt>
                 <c:pt idx="1">
                   <c:v>0</c:v>
@@ -3215,7 +3215,7 @@
                   <c:v>0</c:v>
                 </c:pt>
                 <c:pt idx="3">
-                  <c:v>122</c:v>
+                  <c:v>93</c:v>
                 </c:pt>
               </c:numCache>
             </c:numRef>
@@ -3363,7 +3363,7 @@
                 <c:formatCode>General</c:formatCode>
                 <c:ptCount val="4"/>
                 <c:pt idx="0">
-                  <c:v>51</c:v>
+                  <c:v>56</c:v>
                 </c:pt>
                 <c:pt idx="1">
                   <c:v>0</c:v>
@@ -3372,7 +3372,7 @@
                   <c:v>0</c:v>
                 </c:pt>
                 <c:pt idx="3">
-                  <c:v>39</c:v>
+                  <c:v>44</c:v>
                 </c:pt>
               </c:numCache>
             </c:numRef>
@@ -3478,16 +3478,16 @@
                 <c:formatCode>General</c:formatCode>
                 <c:ptCount val="4"/>
                 <c:pt idx="0">
-                  <c:v>60</c:v>
+                  <c:v>59</c:v>
                 </c:pt>
                 <c:pt idx="1">
                   <c:v>30</c:v>
                 </c:pt>
                 <c:pt idx="2">
-                  <c:v>93</c:v>
+                  <c:v>84</c:v>
                 </c:pt>
                 <c:pt idx="3">
-                  <c:v>102</c:v>
+                  <c:v>80</c:v>
                 </c:pt>
               </c:numCache>
             </c:numRef>
@@ -3551,7 +3551,7 @@
                 <c:formatCode>General</c:formatCode>
                 <c:ptCount val="4"/>
                 <c:pt idx="0">
-                  <c:v>93</c:v>
+                  <c:v>134</c:v>
                 </c:pt>
                 <c:pt idx="1">
                   <c:v>0</c:v>
@@ -3560,7 +3560,7 @@
                   <c:v>0</c:v>
                 </c:pt>
                 <c:pt idx="3">
-                  <c:v>96</c:v>
+                  <c:v>84</c:v>
                 </c:pt>
               </c:numCache>
             </c:numRef>
@@ -3606,7 +3606,7 @@
         <c:axId val="1358370032"/>
         <c:scaling>
           <c:orientation val="minMax"/>
-          <c:max val="394.90000000000003"/>
+          <c:max val="367.40000000000003"/>
           <c:min val="0.0"/>
         </c:scaling>
         <c:delete val="0"/>
@@ -3823,7 +3823,7 @@
                 <c:formatCode>General</c:formatCode>
                 <c:ptCount val="2"/>
                 <c:pt idx="0">
-                  <c:v>7</c:v>
+                  <c:v>11</c:v>
                 </c:pt>
                 <c:pt idx="1">
                   <c:v>0</c:v>
@@ -3968,7 +3968,7 @@
                 <c:formatCode>General</c:formatCode>
                 <c:ptCount val="2"/>
                 <c:pt idx="0">
-                  <c:v>12</c:v>
+                  <c:v>26</c:v>
                 </c:pt>
                 <c:pt idx="1">
                   <c:v>1</c:v>
@@ -4071,10 +4071,10 @@
                 <c:formatCode>General</c:formatCode>
                 <c:ptCount val="2"/>
                 <c:pt idx="0">
-                  <c:v>18</c:v>
+                  <c:v>36</c:v>
                 </c:pt>
                 <c:pt idx="1">
-                  <c:v>4</c:v>
+                  <c:v>1</c:v>
                 </c:pt>
               </c:numCache>
             </c:numRef>
@@ -4132,10 +4132,10 @@
                 <c:formatCode>General</c:formatCode>
                 <c:ptCount val="2"/>
                 <c:pt idx="0">
-                  <c:v>3</c:v>
+                  <c:v>6</c:v>
                 </c:pt>
                 <c:pt idx="1">
-                  <c:v>38</c:v>
+                  <c:v>35</c:v>
                 </c:pt>
               </c:numCache>
             </c:numRef>
@@ -4181,7 +4181,7 @@
         <c:axId val="1358370032"/>
         <c:scaling>
           <c:orientation val="minMax"/>
-          <c:max val="394.90000000000003"/>
+          <c:max val="367.40000000000003"/>
           <c:min val="0.0"/>
         </c:scaling>
         <c:delete val="1"/>
@@ -30928,7 +30928,7 @@
             <a:pPr indent="-283845"/>
             <a:r>
               <a:rPr lang="en-US" dirty="0"/>
-              <a:t>The average Architecture Quality rating for the portfolio is 2.6</a:t>
+              <a:t>The average Architecture Quality rating for the portfolio is 2.4</a:t>
             </a:r>
             <a:r>
               <a:rPr lang="en-US" sz="100" dirty="0"/>
@@ -30943,7 +30943,7 @@
             <a:pPr indent="-283845"/>
             <a:r>
               <a:rPr lang="en-US" dirty="0"/>
-              <a:t>33% of systems score above market average for Architecture Quality (≥3.5★).</a:t>
+              <a:t>25% of systems score above market average for Architecture Quality (≥3.5★).</a:t>
             </a:r>
           </a:p>
           <a:p>
@@ -30957,7 +30957,7 @@
             <a:pPr indent="-283845"/>
             <a:r>
               <a:rPr lang="en-US" dirty="0"/>
-              <a:t>33% of systems score below market average for Architecture Quality (≤2.5★).</a:t>
+              <a:t>42% of systems score below market average for Architecture Quality (≤2.5★).</a:t>
             </a:r>
           </a:p>
         </p:txBody>
@@ -32128,7 +32128,7 @@
             <a:pPr indent="-283845"/>
             <a:r>
               <a:rPr lang="en-US" dirty="0"/>
-              <a:t>The average Open Source Health rating for the portfolio is 2.7</a:t>
+              <a:t>The average Open Source Health rating for the portfolio is 2.6</a:t>
             </a:r>
             <a:r>
               <a:rPr lang="en-US" sz="100" dirty="0"/>
@@ -32143,21 +32143,21 @@
             <a:pPr indent="-283845"/>
             <a:r>
               <a:rPr lang="en-GB" dirty="0"/>
-              <a:t>58% of systems score above market average for Open Source Health (≥3.5★).</a:t>
+              <a:t>42% of systems score above market average for Open Source Health (≥3.5★).</a:t>
             </a:r>
           </a:p>
           <a:p>
             <a:pPr indent="-283845"/>
             <a:r>
               <a:rPr lang="en-US" dirty="0"/>
-              <a:t>33% of systems score market average for Open Source Health (3★).</a:t>
+              <a:t>42% of systems score market average for Open Source Health (3★).</a:t>
             </a:r>
           </a:p>
           <a:p>
             <a:pPr indent="-283845"/>
             <a:r>
               <a:rPr lang="en-US" dirty="0"/>
-              <a:t>8% of systems score below market average for Open Source Health (≤2.5★).</a:t>
+              <a:t>17% of systems score below market average for Open Source Health (≤2.5★).</a:t>
             </a:r>
           </a:p>
         </p:txBody>
@@ -32330,25 +32330,25 @@
           <a:p>
             <a:r>
               <a:rPr lang="en-US" dirty="0"/>
-              <a:t>3% of dependencies (40 in total) used in the system contain one or more known vulnerabilities.</a:t>
+              <a:t>5% of dependencies (79 in total) used in the system contain one or more known vulnerabilities.</a:t>
             </a:r>
           </a:p>
           <a:p>
             <a:r>
               <a:rPr lang="en-US" dirty="0"/>
-              <a:t>1% of dependencies (5 in total) uses a potentially restrictive open-source license (e.g. GPL/AGPL).</a:t>
+              <a:t>1% of dependencies (2 in total) uses a potentially restrictive open-source license (e.g. GPL/AGPL).</a:t>
             </a:r>
           </a:p>
           <a:p>
             <a:r>
               <a:rPr lang="en-US" dirty="0"/>
-              <a:t>12% of dependencies (190 in total) used in the system have not been updated for over 2 years.</a:t>
+              <a:t>13% of dependencies (200 in total) used in the system have not been updated for over 2 years.</a:t>
             </a:r>
           </a:p>
           <a:p>
             <a:r>
               <a:rPr lang="en-US" dirty="0"/>
-              <a:t>6% of dependencies (93 in total) does not use a package manager but is placed in the codebase directly.</a:t>
+              <a:t>5% of dependencies (84 in total) does not use a package manager but is placed in the codebase directly.</a:t>
             </a:r>
           </a:p>
         </p:txBody>
@@ -32383,7 +32383,7 @@
           <a:p>
             <a:r>
               <a:rPr lang="en-US" b="0" dirty="0"/>
-              <a:t>1529</a:t>
+              <a:t>1567</a:t>
             </a:r>
           </a:p>
         </p:txBody>
@@ -32413,7 +32413,7 @@
           <a:p>
             <a:r>
               <a:rPr lang="en-US" b="0" dirty="0"/>
-              <a:t>91</a:t>
+              <a:t>112</a:t>
             </a:r>
           </a:p>
         </p:txBody>
@@ -32473,7 +32473,7 @@
           <a:p>
             <a:r>
               <a:rPr lang="en-US" b="0" dirty="0"/>
-              <a:t>158</a:t>
+              <a:t>197</a:t>
             </a:r>
           </a:p>
         </p:txBody>
@@ -32503,7 +32503,7 @@
           <a:p>
             <a:r>
               <a:rPr lang="en-US" b="0" dirty="0"/>
-              <a:t>855</a:t>
+              <a:t>845</a:t>
             </a:r>
           </a:p>
         </p:txBody>
@@ -32533,7 +32533,7 @@
           <a:p>
             <a:r>
               <a:rPr lang="en-US" b="0" dirty="0"/>
-              <a:t>174</a:t>
+              <a:t>162</a:t>
             </a:r>
           </a:p>
         </p:txBody>
@@ -33860,14 +33860,14 @@
             <a:pPr indent="-283845"/>
             <a:r>
               <a:rPr lang="en-US" dirty="0"/>
-              <a:t>25% of systems score market average for Security (3★).</a:t>
+              <a:t>17% of systems score market average for Security (3★).</a:t>
             </a:r>
           </a:p>
           <a:p>
             <a:pPr indent="-283845"/>
             <a:r>
               <a:rPr lang="en-US" dirty="0"/>
-              <a:t>67% of systems score below market average for Security(≤2.5★).</a:t>
+              <a:t>75% of systems score below market average for Security(≤2.5★).</a:t>
             </a:r>
           </a:p>
         </p:txBody>

--- a/tests/report_generator/integration/references/reference_portfolio-baseline-report.pptx
+++ b/tests/report_generator/integration/references/reference_portfolio-baseline-report.pptx
@@ -3206,16 +3206,16 @@
                 <c:formatCode>General</c:formatCode>
                 <c:ptCount val="4"/>
                 <c:pt idx="0">
-                  <c:v>85</c:v>
+                  <c:v>16</c:v>
                 </c:pt>
                 <c:pt idx="1">
-                  <c:v>0</c:v>
+                  <c:v>16</c:v>
                 </c:pt>
                 <c:pt idx="2">
-                  <c:v>0</c:v>
+                  <c:v>16</c:v>
                 </c:pt>
                 <c:pt idx="3">
-                  <c:v>93</c:v>
+                  <c:v>16</c:v>
                 </c:pt>
               </c:numCache>
             </c:numRef>
@@ -3363,16 +3363,16 @@
                 <c:formatCode>General</c:formatCode>
                 <c:ptCount val="4"/>
                 <c:pt idx="0">
-                  <c:v>56</c:v>
+                  <c:v>16</c:v>
                 </c:pt>
                 <c:pt idx="1">
-                  <c:v>0</c:v>
+                  <c:v>16</c:v>
                 </c:pt>
                 <c:pt idx="2">
-                  <c:v>0</c:v>
+                  <c:v>16</c:v>
                 </c:pt>
                 <c:pt idx="3">
-                  <c:v>44</c:v>
+                  <c:v>16</c:v>
                 </c:pt>
               </c:numCache>
             </c:numRef>
@@ -3478,16 +3478,16 @@
                 <c:formatCode>General</c:formatCode>
                 <c:ptCount val="4"/>
                 <c:pt idx="0">
-                  <c:v>59</c:v>
+                  <c:v>16</c:v>
                 </c:pt>
                 <c:pt idx="1">
-                  <c:v>30</c:v>
+                  <c:v>16</c:v>
                 </c:pt>
                 <c:pt idx="2">
-                  <c:v>84</c:v>
+                  <c:v>16</c:v>
                 </c:pt>
                 <c:pt idx="3">
-                  <c:v>80</c:v>
+                  <c:v>16</c:v>
                 </c:pt>
               </c:numCache>
             </c:numRef>
@@ -3551,16 +3551,16 @@
                 <c:formatCode>General</c:formatCode>
                 <c:ptCount val="4"/>
                 <c:pt idx="0">
-                  <c:v>134</c:v>
+                  <c:v>16</c:v>
                 </c:pt>
                 <c:pt idx="1">
-                  <c:v>0</c:v>
+                  <c:v>16</c:v>
                 </c:pt>
                 <c:pt idx="2">
-                  <c:v>0</c:v>
+                  <c:v>16</c:v>
                 </c:pt>
                 <c:pt idx="3">
-                  <c:v>84</c:v>
+                  <c:v>16</c:v>
                 </c:pt>
               </c:numCache>
             </c:numRef>
@@ -3606,7 +3606,7 @@
         <c:axId val="1358370032"/>
         <c:scaling>
           <c:orientation val="minMax"/>
-          <c:max val="367.40000000000003"/>
+          <c:max val="70.4"/>
           <c:min val="0.0"/>
         </c:scaling>
         <c:delete val="0"/>
@@ -3823,10 +3823,10 @@
                 <c:formatCode>General</c:formatCode>
                 <c:ptCount val="2"/>
                 <c:pt idx="0">
-                  <c:v>11</c:v>
+                  <c:v>16</c:v>
                 </c:pt>
                 <c:pt idx="1">
-                  <c:v>0</c:v>
+                  <c:v>16</c:v>
                 </c:pt>
               </c:numCache>
             </c:numRef>
@@ -3968,10 +3968,10 @@
                 <c:formatCode>General</c:formatCode>
                 <c:ptCount val="2"/>
                 <c:pt idx="0">
-                  <c:v>26</c:v>
+                  <c:v>16</c:v>
                 </c:pt>
                 <c:pt idx="1">
-                  <c:v>1</c:v>
+                  <c:v>16</c:v>
                 </c:pt>
               </c:numCache>
             </c:numRef>
@@ -4071,10 +4071,10 @@
                 <c:formatCode>General</c:formatCode>
                 <c:ptCount val="2"/>
                 <c:pt idx="0">
-                  <c:v>36</c:v>
+                  <c:v>16</c:v>
                 </c:pt>
                 <c:pt idx="1">
-                  <c:v>1</c:v>
+                  <c:v>16</c:v>
                 </c:pt>
               </c:numCache>
             </c:numRef>
@@ -4132,10 +4132,10 @@
                 <c:formatCode>General</c:formatCode>
                 <c:ptCount val="2"/>
                 <c:pt idx="0">
-                  <c:v>6</c:v>
+                  <c:v>16</c:v>
                 </c:pt>
                 <c:pt idx="1">
-                  <c:v>35</c:v>
+                  <c:v>16</c:v>
                 </c:pt>
               </c:numCache>
             </c:numRef>
@@ -4181,7 +4181,7 @@
         <c:axId val="1358370032"/>
         <c:scaling>
           <c:orientation val="minMax"/>
-          <c:max val="367.40000000000003"/>
+          <c:max val="70.4"/>
           <c:min val="0.0"/>
         </c:scaling>
         <c:delete val="1"/>
@@ -32128,7 +32128,7 @@
             <a:pPr indent="-283845"/>
             <a:r>
               <a:rPr lang="en-US" dirty="0"/>
-              <a:t>The average Open Source Health rating for the portfolio is 2.6</a:t>
+              <a:t>The average Open Source Health rating for the portfolio is 2.9</a:t>
             </a:r>
             <a:r>
               <a:rPr lang="en-US" sz="100" dirty="0"/>
@@ -32143,7 +32143,7 @@
             <a:pPr indent="-283845"/>
             <a:r>
               <a:rPr lang="en-GB" dirty="0"/>
-              <a:t>42% of systems score above market average for Open Source Health (≥3.5★).</a:t>
+              <a:t>33% of systems score above market average for Open Source Health (≥3.5★).</a:t>
             </a:r>
           </a:p>
           <a:p>
@@ -32157,7 +32157,7 @@
             <a:pPr indent="-283845"/>
             <a:r>
               <a:rPr lang="en-US" dirty="0"/>
-              <a:t>17% of systems score below market average for Open Source Health (≤2.5★).</a:t>
+              <a:t>25% of systems score below market average for Open Source Health (≤2.5★).</a:t>
             </a:r>
           </a:p>
         </p:txBody>
@@ -32330,25 +32330,25 @@
           <a:p>
             <a:r>
               <a:rPr lang="en-US" dirty="0"/>
-              <a:t>5% of dependencies (79 in total) used in the system contain one or more known vulnerabilities.</a:t>
+              <a:t>67% of dependencies (64 in total) used in the system contain one or more known vulnerabilities.</a:t>
             </a:r>
           </a:p>
           <a:p>
             <a:r>
               <a:rPr lang="en-US" dirty="0"/>
-              <a:t>1% of dependencies (2 in total) uses a potentially restrictive open-source license (e.g. GPL/AGPL).</a:t>
+              <a:t>50% of dependencies (48 in total) uses a potentially restrictive open-source license (e.g. GPL/AGPL).</a:t>
             </a:r>
           </a:p>
           <a:p>
             <a:r>
               <a:rPr lang="en-US" dirty="0"/>
-              <a:t>13% of dependencies (200 in total) used in the system have not been updated for over 2 years.</a:t>
+              <a:t>50% of dependencies (48 in total) used in the system have not been updated for over 2 years.</a:t>
             </a:r>
           </a:p>
           <a:p>
             <a:r>
               <a:rPr lang="en-US" dirty="0"/>
-              <a:t>5% of dependencies (84 in total) does not use a package manager but is placed in the codebase directly.</a:t>
+              <a:t>67% of dependencies (64 in total) does not use a package manager but is placed in the codebase directly.</a:t>
             </a:r>
           </a:p>
         </p:txBody>
@@ -32383,7 +32383,7 @@
           <a:p>
             <a:r>
               <a:rPr lang="en-US" b="0" dirty="0"/>
-              <a:t>1567</a:t>
+              <a:t>96</a:t>
             </a:r>
           </a:p>
         </p:txBody>
@@ -32413,7 +32413,7 @@
           <a:p>
             <a:r>
               <a:rPr lang="en-US" b="0" dirty="0"/>
-              <a:t>112</a:t>
+              <a:t>0</a:t>
             </a:r>
           </a:p>
         </p:txBody>
@@ -32443,7 +32443,7 @@
           <a:p>
             <a:r>
               <a:rPr lang="en-US" b="0" dirty="0"/>
-              <a:t>251</a:t>
+              <a:t>0</a:t>
             </a:r>
           </a:p>
         </p:txBody>
@@ -32473,7 +32473,7 @@
           <a:p>
             <a:r>
               <a:rPr lang="en-US" b="0" dirty="0"/>
-              <a:t>197</a:t>
+              <a:t>0</a:t>
             </a:r>
           </a:p>
         </p:txBody>
@@ -32503,7 +32503,7 @@
           <a:p>
             <a:r>
               <a:rPr lang="en-US" b="0" dirty="0"/>
-              <a:t>845</a:t>
+              <a:t>0</a:t>
             </a:r>
           </a:p>
         </p:txBody>
@@ -32533,7 +32533,7 @@
           <a:p>
             <a:r>
               <a:rPr lang="en-US" b="0" dirty="0"/>
-              <a:t>162</a:t>
+              <a:t>96</a:t>
             </a:r>
           </a:p>
         </p:txBody>
@@ -33838,7 +33838,7 @@
             <a:pPr indent="-283845"/>
             <a:r>
               <a:rPr lang="en-US" dirty="0"/>
-              <a:t>The average Security rating for the portfolio is 1.8</a:t>
+              <a:t>The average Security rating for the portfolio is 3.7</a:t>
             </a:r>
             <a:r>
               <a:rPr lang="en-US" sz="100" dirty="0"/>
@@ -33853,21 +33853,21 @@
             <a:pPr indent="-283845"/>
             <a:r>
               <a:rPr lang="en-GB" dirty="0"/>
-              <a:t>8% of systems score above market average for Security (≥3.5★).</a:t>
+              <a:t>33% of systems score above market average for Security (≥3.5★).</a:t>
             </a:r>
           </a:p>
           <a:p>
             <a:pPr indent="-283845"/>
             <a:r>
               <a:rPr lang="en-US" dirty="0"/>
-              <a:t>17% of systems score market average for Security (3★).</a:t>
+              <a:t>33% of systems score market average for Security (3★).</a:t>
             </a:r>
           </a:p>
           <a:p>
             <a:pPr indent="-283845"/>
             <a:r>
               <a:rPr lang="en-US" dirty="0"/>
-              <a:t>75% of systems score below market average for Security(≤2.5★).</a:t>
+              <a:t>33% of systems score below market average for Security(≤2.5★).</a:t>
             </a:r>
           </a:p>
         </p:txBody>

--- a/tests/report_generator/integration/references/reference_portfolio-baseline-report.pptx
+++ b/tests/report_generator/integration/references/reference_portfolio-baseline-report.pptx
@@ -30928,7 +30928,7 @@
             <a:pPr indent="-283845"/>
             <a:r>
               <a:rPr lang="en-US" dirty="0"/>
-              <a:t>The average Architecture Quality rating for the portfolio is 2.4</a:t>
+              <a:t>The average Architecture Quality rating for the portfolio is 2.6</a:t>
             </a:r>
             <a:r>
               <a:rPr lang="en-US" sz="100" dirty="0"/>
@@ -30943,7 +30943,7 @@
             <a:pPr indent="-283845"/>
             <a:r>
               <a:rPr lang="en-US" dirty="0"/>
-              <a:t>25% of systems score above market average for Architecture Quality (≥3.5★).</a:t>
+              <a:t>33% of systems score above market average for Architecture Quality (≥3.5★).</a:t>
             </a:r>
           </a:p>
           <a:p>
@@ -30957,7 +30957,7 @@
             <a:pPr indent="-283845"/>
             <a:r>
               <a:rPr lang="en-US" dirty="0"/>
-              <a:t>42% of systems score below market average for Architecture Quality (≤2.5★).</a:t>
+              <a:t>33% of systems score below market average for Architecture Quality (≤2.5★).</a:t>
             </a:r>
           </a:p>
         </p:txBody>
